--- a/figures/UI.pptx
+++ b/figures/UI.pptx
@@ -11,6 +11,7 @@
     <p:sldId id="259" r:id="rId5"/>
     <p:sldId id="261" r:id="rId6"/>
     <p:sldId id="260" r:id="rId7"/>
+    <p:sldId id="262" r:id="rId8"/>
   </p:sldIdLst>
   <p:sldSz cx="12192000" cy="6858000"/>
   <p:notesSz cx="6858000" cy="9144000"/>
@@ -109,6 +110,11 @@
       </a:defRPr>
     </a:lvl9pPr>
   </p:defaultTextStyle>
+  <p:extLst>
+    <p:ext uri="{EFAFB233-063F-42B5-8137-9DF3F51BA10A}">
+      <p15:sldGuideLst xmlns:p15="http://schemas.microsoft.com/office/powerpoint/2012/main"/>
+    </p:ext>
+  </p:extLst>
 </p:presentation>
 </file>
 
@@ -243,7 +249,7 @@
           <a:p>
             <a:fld id="{B8AEFEE7-ED1A-4844-BF2B-91A0172AE551}" type="datetimeFigureOut">
               <a:rPr lang="en-US" smtClean="0"/>
-              <a:t>4/26/2026</a:t>
+              <a:t>4/27/2026</a:t>
             </a:fld>
             <a:endParaRPr lang="en-US"/>
           </a:p>
@@ -413,7 +419,7 @@
           <a:p>
             <a:fld id="{B8AEFEE7-ED1A-4844-BF2B-91A0172AE551}" type="datetimeFigureOut">
               <a:rPr lang="en-US" smtClean="0"/>
-              <a:t>4/26/2026</a:t>
+              <a:t>4/27/2026</a:t>
             </a:fld>
             <a:endParaRPr lang="en-US"/>
           </a:p>
@@ -593,7 +599,7 @@
           <a:p>
             <a:fld id="{B8AEFEE7-ED1A-4844-BF2B-91A0172AE551}" type="datetimeFigureOut">
               <a:rPr lang="en-US" smtClean="0"/>
-              <a:t>4/26/2026</a:t>
+              <a:t>4/27/2026</a:t>
             </a:fld>
             <a:endParaRPr lang="en-US"/>
           </a:p>
@@ -763,7 +769,7 @@
           <a:p>
             <a:fld id="{B8AEFEE7-ED1A-4844-BF2B-91A0172AE551}" type="datetimeFigureOut">
               <a:rPr lang="en-US" smtClean="0"/>
-              <a:t>4/26/2026</a:t>
+              <a:t>4/27/2026</a:t>
             </a:fld>
             <a:endParaRPr lang="en-US"/>
           </a:p>
@@ -1009,7 +1015,7 @@
           <a:p>
             <a:fld id="{B8AEFEE7-ED1A-4844-BF2B-91A0172AE551}" type="datetimeFigureOut">
               <a:rPr lang="en-US" smtClean="0"/>
-              <a:t>4/26/2026</a:t>
+              <a:t>4/27/2026</a:t>
             </a:fld>
             <a:endParaRPr lang="en-US"/>
           </a:p>
@@ -1241,7 +1247,7 @@
           <a:p>
             <a:fld id="{B8AEFEE7-ED1A-4844-BF2B-91A0172AE551}" type="datetimeFigureOut">
               <a:rPr lang="en-US" smtClean="0"/>
-              <a:t>4/26/2026</a:t>
+              <a:t>4/27/2026</a:t>
             </a:fld>
             <a:endParaRPr lang="en-US"/>
           </a:p>
@@ -1608,7 +1614,7 @@
           <a:p>
             <a:fld id="{B8AEFEE7-ED1A-4844-BF2B-91A0172AE551}" type="datetimeFigureOut">
               <a:rPr lang="en-US" smtClean="0"/>
-              <a:t>4/26/2026</a:t>
+              <a:t>4/27/2026</a:t>
             </a:fld>
             <a:endParaRPr lang="en-US"/>
           </a:p>
@@ -1726,7 +1732,7 @@
           <a:p>
             <a:fld id="{B8AEFEE7-ED1A-4844-BF2B-91A0172AE551}" type="datetimeFigureOut">
               <a:rPr lang="en-US" smtClean="0"/>
-              <a:t>4/26/2026</a:t>
+              <a:t>4/27/2026</a:t>
             </a:fld>
             <a:endParaRPr lang="en-US"/>
           </a:p>
@@ -1821,7 +1827,7 @@
           <a:p>
             <a:fld id="{B8AEFEE7-ED1A-4844-BF2B-91A0172AE551}" type="datetimeFigureOut">
               <a:rPr lang="en-US" smtClean="0"/>
-              <a:t>4/26/2026</a:t>
+              <a:t>4/27/2026</a:t>
             </a:fld>
             <a:endParaRPr lang="en-US"/>
           </a:p>
@@ -2098,7 +2104,7 @@
           <a:p>
             <a:fld id="{B8AEFEE7-ED1A-4844-BF2B-91A0172AE551}" type="datetimeFigureOut">
               <a:rPr lang="en-US" smtClean="0"/>
-              <a:t>4/26/2026</a:t>
+              <a:t>4/27/2026</a:t>
             </a:fld>
             <a:endParaRPr lang="en-US"/>
           </a:p>
@@ -2351,7 +2357,7 @@
           <a:p>
             <a:fld id="{B8AEFEE7-ED1A-4844-BF2B-91A0172AE551}" type="datetimeFigureOut">
               <a:rPr lang="en-US" smtClean="0"/>
-              <a:t>4/26/2026</a:t>
+              <a:t>4/27/2026</a:t>
             </a:fld>
             <a:endParaRPr lang="en-US"/>
           </a:p>
@@ -2564,7 +2570,7 @@
           <a:p>
             <a:fld id="{B8AEFEE7-ED1A-4844-BF2B-91A0172AE551}" type="datetimeFigureOut">
               <a:rPr lang="en-US" smtClean="0"/>
-              <a:t>4/26/2026</a:t>
+              <a:t>4/27/2026</a:t>
             </a:fld>
             <a:endParaRPr lang="en-US"/>
           </a:p>
@@ -3414,6 +3420,1373 @@
 </p:sld>
 </file>
 
+<file path=ppt/slides/slide7.xml><?xml version="1.0" encoding="utf-8"?>
+<p:sld xmlns:a="http://schemas.openxmlformats.org/drawingml/2006/main" xmlns:r="http://schemas.openxmlformats.org/officeDocument/2006/relationships" xmlns:p="http://schemas.openxmlformats.org/presentationml/2006/main">
+  <p:cSld>
+    <p:spTree>
+      <p:nvGrpSpPr>
+        <p:cNvPr id="1" name=""/>
+        <p:cNvGrpSpPr/>
+        <p:nvPr/>
+      </p:nvGrpSpPr>
+      <p:grpSpPr>
+        <a:xfrm>
+          <a:off x="0" y="0"/>
+          <a:ext cx="0" cy="0"/>
+          <a:chOff x="0" y="0"/>
+          <a:chExt cx="0" cy="0"/>
+        </a:xfrm>
+      </p:grpSpPr>
+      <p:sp>
+        <p:nvSpPr>
+          <p:cNvPr id="4" name="TextBox 3"/>
+          <p:cNvSpPr txBox="1"/>
+          <p:nvPr/>
+        </p:nvSpPr>
+        <p:spPr>
+          <a:xfrm>
+            <a:off x="568357" y="705923"/>
+            <a:ext cx="1439240" cy="461665"/>
+          </a:xfrm>
+          <a:prstGeom prst="rect">
+            <a:avLst/>
+          </a:prstGeom>
+          <a:noFill/>
+        </p:spPr>
+        <p:txBody>
+          <a:bodyPr wrap="none" rtlCol="0">
+            <a:spAutoFit/>
+          </a:bodyPr>
+          <a:lstStyle/>
+          <a:p>
+            <a:r>
+              <a:rPr lang="en-US" sz="2400" b="1" dirty="0" smtClean="0"/>
+              <a:t>Job board</a:t>
+            </a:r>
+            <a:endParaRPr lang="en-US" sz="2400" b="1" dirty="0"/>
+          </a:p>
+        </p:txBody>
+      </p:sp>
+      <p:sp>
+        <p:nvSpPr>
+          <p:cNvPr id="5" name="TextBox 4"/>
+          <p:cNvSpPr txBox="1"/>
+          <p:nvPr/>
+        </p:nvSpPr>
+        <p:spPr>
+          <a:xfrm>
+            <a:off x="573165" y="1928093"/>
+            <a:ext cx="1429623" cy="830997"/>
+          </a:xfrm>
+          <a:prstGeom prst="rect">
+            <a:avLst/>
+          </a:prstGeom>
+          <a:noFill/>
+        </p:spPr>
+        <p:txBody>
+          <a:bodyPr wrap="none" rtlCol="0">
+            <a:spAutoFit/>
+          </a:bodyPr>
+          <a:lstStyle/>
+          <a:p>
+            <a:pPr algn="ctr"/>
+            <a:r>
+              <a:rPr lang="en-US" sz="2400" b="1" dirty="0" smtClean="0">
+                <a:solidFill>
+                  <a:schemeClr val="accent1">
+                    <a:lumMod val="50000"/>
+                  </a:schemeClr>
+                </a:solidFill>
+              </a:rPr>
+              <a:t>Chrome</a:t>
+            </a:r>
+          </a:p>
+          <a:p>
+            <a:pPr algn="ctr"/>
+            <a:r>
+              <a:rPr lang="en-US" sz="2400" b="1" dirty="0" smtClean="0">
+                <a:solidFill>
+                  <a:schemeClr val="accent1">
+                    <a:lumMod val="50000"/>
+                  </a:schemeClr>
+                </a:solidFill>
+              </a:rPr>
+              <a:t>Extension</a:t>
+            </a:r>
+            <a:endParaRPr lang="en-US" sz="2400" b="1" dirty="0">
+              <a:solidFill>
+                <a:schemeClr val="accent1">
+                  <a:lumMod val="50000"/>
+                </a:schemeClr>
+              </a:solidFill>
+            </a:endParaRPr>
+          </a:p>
+        </p:txBody>
+      </p:sp>
+      <p:sp>
+        <p:nvSpPr>
+          <p:cNvPr id="6" name="TextBox 5"/>
+          <p:cNvSpPr txBox="1"/>
+          <p:nvPr/>
+        </p:nvSpPr>
+        <p:spPr>
+          <a:xfrm>
+            <a:off x="574616" y="3955227"/>
+            <a:ext cx="1505285" cy="830997"/>
+          </a:xfrm>
+          <a:prstGeom prst="rect">
+            <a:avLst/>
+          </a:prstGeom>
+          <a:noFill/>
+        </p:spPr>
+        <p:txBody>
+          <a:bodyPr wrap="none" rtlCol="0">
+            <a:spAutoFit/>
+          </a:bodyPr>
+          <a:lstStyle/>
+          <a:p>
+            <a:pPr algn="ctr"/>
+            <a:r>
+              <a:rPr lang="en-US" sz="2400" b="1" dirty="0" err="1" smtClean="0">
+                <a:solidFill>
+                  <a:schemeClr val="accent2">
+                    <a:lumMod val="50000"/>
+                  </a:schemeClr>
+                </a:solidFill>
+              </a:rPr>
+              <a:t>Cloudflare</a:t>
+            </a:r>
+            <a:endParaRPr lang="en-US" sz="2400" b="1" dirty="0" smtClean="0">
+              <a:solidFill>
+                <a:schemeClr val="accent2">
+                  <a:lumMod val="50000"/>
+                </a:schemeClr>
+              </a:solidFill>
+            </a:endParaRPr>
+          </a:p>
+          <a:p>
+            <a:pPr algn="ctr"/>
+            <a:r>
+              <a:rPr lang="en-US" sz="2400" b="1" dirty="0" smtClean="0">
+                <a:solidFill>
+                  <a:schemeClr val="accent2">
+                    <a:lumMod val="50000"/>
+                  </a:schemeClr>
+                </a:solidFill>
+              </a:rPr>
+              <a:t>Worker</a:t>
+            </a:r>
+            <a:endParaRPr lang="en-US" sz="2400" b="1" dirty="0">
+              <a:solidFill>
+                <a:schemeClr val="accent2">
+                  <a:lumMod val="50000"/>
+                </a:schemeClr>
+              </a:solidFill>
+            </a:endParaRPr>
+          </a:p>
+        </p:txBody>
+      </p:sp>
+      <p:sp>
+        <p:nvSpPr>
+          <p:cNvPr id="7" name="TextBox 6"/>
+          <p:cNvSpPr txBox="1"/>
+          <p:nvPr/>
+        </p:nvSpPr>
+        <p:spPr>
+          <a:xfrm>
+            <a:off x="1017896" y="5811826"/>
+            <a:ext cx="452368" cy="461665"/>
+          </a:xfrm>
+          <a:prstGeom prst="rect">
+            <a:avLst/>
+          </a:prstGeom>
+          <a:noFill/>
+        </p:spPr>
+        <p:txBody>
+          <a:bodyPr wrap="none" rtlCol="0">
+            <a:spAutoFit/>
+          </a:bodyPr>
+          <a:lstStyle/>
+          <a:p>
+            <a:r>
+              <a:rPr lang="en-US" sz="2400" b="1" dirty="0" smtClean="0">
+                <a:solidFill>
+                  <a:schemeClr val="accent6">
+                    <a:lumMod val="50000"/>
+                  </a:schemeClr>
+                </a:solidFill>
+              </a:rPr>
+              <a:t>AI</a:t>
+            </a:r>
+            <a:endParaRPr lang="en-US" sz="2400" b="1" dirty="0">
+              <a:solidFill>
+                <a:schemeClr val="accent6">
+                  <a:lumMod val="50000"/>
+                </a:schemeClr>
+              </a:solidFill>
+            </a:endParaRPr>
+          </a:p>
+        </p:txBody>
+      </p:sp>
+      <p:pic>
+        <p:nvPicPr>
+          <p:cNvPr id="1028" name="Picture 4" descr="Indeed Logo Download png"/>
+          <p:cNvPicPr>
+            <a:picLocks noChangeAspect="1" noChangeArrowheads="1"/>
+          </p:cNvPicPr>
+          <p:nvPr/>
+        </p:nvPicPr>
+        <p:blipFill>
+          <a:blip r:embed="rId2" cstate="print">
+            <a:extLst>
+              <a:ext uri="{28A0092B-C50C-407E-A947-70E740481C1C}">
+                <a14:useLocalDpi xmlns:a14="http://schemas.microsoft.com/office/drawing/2010/main" val="0"/>
+              </a:ext>
+            </a:extLst>
+          </a:blip>
+          <a:srcRect/>
+          <a:stretch>
+            <a:fillRect/>
+          </a:stretch>
+        </p:blipFill>
+        <p:spPr bwMode="auto">
+          <a:xfrm>
+            <a:off x="5005202" y="274852"/>
+            <a:ext cx="1299916" cy="1299916"/>
+          </a:xfrm>
+          <a:prstGeom prst="rect">
+            <a:avLst/>
+          </a:prstGeom>
+          <a:noFill/>
+          <a:extLst>
+            <a:ext uri="{909E8E84-426E-40DD-AFC4-6F175D3DCCD1}">
+              <a14:hiddenFill xmlns:a14="http://schemas.microsoft.com/office/drawing/2010/main">
+                <a:solidFill>
+                  <a:srgbClr val="FFFFFF"/>
+                </a:solidFill>
+              </a14:hiddenFill>
+            </a:ext>
+          </a:extLst>
+        </p:spPr>
+      </p:pic>
+      <p:pic>
+        <p:nvPicPr>
+          <p:cNvPr id="1030" name="Picture 6" descr="Linkedin Logo, symbol, meaning, history, Vector, PNG"/>
+          <p:cNvPicPr>
+            <a:picLocks noChangeAspect="1" noChangeArrowheads="1"/>
+          </p:cNvPicPr>
+          <p:nvPr/>
+        </p:nvPicPr>
+        <p:blipFill>
+          <a:blip r:embed="rId3" cstate="print">
+            <a:extLst>
+              <a:ext uri="{28A0092B-C50C-407E-A947-70E740481C1C}">
+                <a14:useLocalDpi xmlns:a14="http://schemas.microsoft.com/office/drawing/2010/main" val="0"/>
+              </a:ext>
+            </a:extLst>
+          </a:blip>
+          <a:srcRect/>
+          <a:stretch>
+            <a:fillRect/>
+          </a:stretch>
+        </p:blipFill>
+        <p:spPr bwMode="auto">
+          <a:xfrm>
+            <a:off x="3068655" y="437267"/>
+            <a:ext cx="1504686" cy="846386"/>
+          </a:xfrm>
+          <a:prstGeom prst="rect">
+            <a:avLst/>
+          </a:prstGeom>
+          <a:noFill/>
+          <a:extLst>
+            <a:ext uri="{909E8E84-426E-40DD-AFC4-6F175D3DCCD1}">
+              <a14:hiddenFill xmlns:a14="http://schemas.microsoft.com/office/drawing/2010/main">
+                <a:solidFill>
+                  <a:srgbClr val="FFFFFF"/>
+                </a:solidFill>
+              </a14:hiddenFill>
+            </a:ext>
+          </a:extLst>
+        </p:spPr>
+      </p:pic>
+      <p:pic>
+        <p:nvPicPr>
+          <p:cNvPr id="1032" name="Picture 8" descr="File:Workday Logo.png - Wikimedia Commons"/>
+          <p:cNvPicPr>
+            <a:picLocks noChangeAspect="1" noChangeArrowheads="1"/>
+          </p:cNvPicPr>
+          <p:nvPr/>
+        </p:nvPicPr>
+        <p:blipFill>
+          <a:blip r:embed="rId4" cstate="print">
+            <a:extLst>
+              <a:ext uri="{28A0092B-C50C-407E-A947-70E740481C1C}">
+                <a14:useLocalDpi xmlns:a14="http://schemas.microsoft.com/office/drawing/2010/main" val="0"/>
+              </a:ext>
+            </a:extLst>
+          </a:blip>
+          <a:srcRect/>
+          <a:stretch>
+            <a:fillRect/>
+          </a:stretch>
+        </p:blipFill>
+        <p:spPr bwMode="auto">
+          <a:xfrm>
+            <a:off x="6673930" y="375990"/>
+            <a:ext cx="1939414" cy="752474"/>
+          </a:xfrm>
+          <a:prstGeom prst="rect">
+            <a:avLst/>
+          </a:prstGeom>
+          <a:noFill/>
+          <a:extLst>
+            <a:ext uri="{909E8E84-426E-40DD-AFC4-6F175D3DCCD1}">
+              <a14:hiddenFill xmlns:a14="http://schemas.microsoft.com/office/drawing/2010/main">
+                <a:solidFill>
+                  <a:srgbClr val="FFFFFF"/>
+                </a:solidFill>
+              </a14:hiddenFill>
+            </a:ext>
+          </a:extLst>
+        </p:spPr>
+      </p:pic>
+      <p:pic>
+        <p:nvPicPr>
+          <p:cNvPr id="8" name="Picture 7"/>
+          <p:cNvPicPr>
+            <a:picLocks noChangeAspect="1"/>
+          </p:cNvPicPr>
+          <p:nvPr/>
+        </p:nvPicPr>
+        <p:blipFill>
+          <a:blip r:embed="rId5"/>
+          <a:stretch>
+            <a:fillRect/>
+          </a:stretch>
+        </p:blipFill>
+        <p:spPr>
+          <a:xfrm>
+            <a:off x="9021103" y="675794"/>
+            <a:ext cx="2622899" cy="491794"/>
+          </a:xfrm>
+          <a:prstGeom prst="rect">
+            <a:avLst/>
+          </a:prstGeom>
+        </p:spPr>
+      </p:pic>
+      <p:sp>
+        <p:nvSpPr>
+          <p:cNvPr id="9" name="Rounded Rectangle 8"/>
+          <p:cNvSpPr/>
+          <p:nvPr/>
+        </p:nvSpPr>
+        <p:spPr>
+          <a:xfrm>
+            <a:off x="2654518" y="1833690"/>
+            <a:ext cx="2484120" cy="1115908"/>
+          </a:xfrm>
+          <a:prstGeom prst="roundRect">
+            <a:avLst/>
+          </a:prstGeom>
+          <a:solidFill>
+            <a:schemeClr val="accent1">
+              <a:lumMod val="40000"/>
+              <a:lumOff val="60000"/>
+            </a:schemeClr>
+          </a:solidFill>
+        </p:spPr>
+        <p:style>
+          <a:lnRef idx="2">
+            <a:schemeClr val="accent1">
+              <a:shade val="50000"/>
+            </a:schemeClr>
+          </a:lnRef>
+          <a:fillRef idx="1">
+            <a:schemeClr val="accent1"/>
+          </a:fillRef>
+          <a:effectRef idx="0">
+            <a:schemeClr val="accent1"/>
+          </a:effectRef>
+          <a:fontRef idx="minor">
+            <a:schemeClr val="lt1"/>
+          </a:fontRef>
+        </p:style>
+        <p:txBody>
+          <a:bodyPr rtlCol="0" anchor="ctr"/>
+          <a:lstStyle/>
+          <a:p>
+            <a:pPr algn="ctr"/>
+            <a:r>
+              <a:rPr lang="en-US" sz="2000" dirty="0" smtClean="0">
+                <a:solidFill>
+                  <a:schemeClr val="accent1">
+                    <a:lumMod val="50000"/>
+                  </a:schemeClr>
+                </a:solidFill>
+              </a:rPr>
+              <a:t>content.js</a:t>
+            </a:r>
+          </a:p>
+          <a:p>
+            <a:pPr algn="ctr"/>
+            <a:r>
+              <a:rPr lang="en-US" sz="2000" dirty="0" smtClean="0">
+                <a:solidFill>
+                  <a:schemeClr val="accent1">
+                    <a:lumMod val="50000"/>
+                  </a:schemeClr>
+                </a:solidFill>
+              </a:rPr>
+              <a:t>Scrapes job text</a:t>
+            </a:r>
+            <a:endParaRPr lang="en-US" sz="2000" dirty="0">
+              <a:solidFill>
+                <a:schemeClr val="accent1">
+                  <a:lumMod val="50000"/>
+                </a:schemeClr>
+              </a:solidFill>
+            </a:endParaRPr>
+          </a:p>
+        </p:txBody>
+      </p:sp>
+      <p:sp>
+        <p:nvSpPr>
+          <p:cNvPr id="15" name="Rounded Rectangle 14"/>
+          <p:cNvSpPr/>
+          <p:nvPr/>
+        </p:nvSpPr>
+        <p:spPr>
+          <a:xfrm>
+            <a:off x="5914060" y="1826544"/>
+            <a:ext cx="2484120" cy="1115908"/>
+          </a:xfrm>
+          <a:prstGeom prst="roundRect">
+            <a:avLst/>
+          </a:prstGeom>
+          <a:solidFill>
+            <a:schemeClr val="accent1">
+              <a:lumMod val="40000"/>
+              <a:lumOff val="60000"/>
+            </a:schemeClr>
+          </a:solidFill>
+        </p:spPr>
+        <p:style>
+          <a:lnRef idx="2">
+            <a:schemeClr val="accent1">
+              <a:shade val="50000"/>
+            </a:schemeClr>
+          </a:lnRef>
+          <a:fillRef idx="1">
+            <a:schemeClr val="accent1"/>
+          </a:fillRef>
+          <a:effectRef idx="0">
+            <a:schemeClr val="accent1"/>
+          </a:effectRef>
+          <a:fontRef idx="minor">
+            <a:schemeClr val="lt1"/>
+          </a:fontRef>
+        </p:style>
+        <p:txBody>
+          <a:bodyPr rtlCol="0" anchor="ctr"/>
+          <a:lstStyle/>
+          <a:p>
+            <a:pPr algn="ctr"/>
+            <a:r>
+              <a:rPr lang="en-US" sz="2000" dirty="0" smtClean="0">
+                <a:solidFill>
+                  <a:schemeClr val="accent1">
+                    <a:lumMod val="50000"/>
+                  </a:schemeClr>
+                </a:solidFill>
+              </a:rPr>
+              <a:t>sidepanel.js</a:t>
+            </a:r>
+          </a:p>
+          <a:p>
+            <a:pPr algn="ctr"/>
+            <a:r>
+              <a:rPr lang="en-US" sz="2000" dirty="0" smtClean="0">
+                <a:solidFill>
+                  <a:schemeClr val="accent1">
+                    <a:lumMod val="50000"/>
+                  </a:schemeClr>
+                </a:solidFill>
+              </a:rPr>
+              <a:t>UI + resume input</a:t>
+            </a:r>
+            <a:endParaRPr lang="en-US" sz="2000" dirty="0">
+              <a:solidFill>
+                <a:schemeClr val="accent1">
+                  <a:lumMod val="50000"/>
+                </a:schemeClr>
+              </a:solidFill>
+            </a:endParaRPr>
+          </a:p>
+        </p:txBody>
+      </p:sp>
+      <p:sp>
+        <p:nvSpPr>
+          <p:cNvPr id="16" name="Rounded Rectangle 15"/>
+          <p:cNvSpPr/>
+          <p:nvPr/>
+        </p:nvSpPr>
+        <p:spPr>
+          <a:xfrm>
+            <a:off x="9173602" y="1833690"/>
+            <a:ext cx="2484120" cy="1115908"/>
+          </a:xfrm>
+          <a:prstGeom prst="roundRect">
+            <a:avLst/>
+          </a:prstGeom>
+          <a:solidFill>
+            <a:schemeClr val="accent1">
+              <a:lumMod val="40000"/>
+              <a:lumOff val="60000"/>
+            </a:schemeClr>
+          </a:solidFill>
+        </p:spPr>
+        <p:style>
+          <a:lnRef idx="2">
+            <a:schemeClr val="accent1">
+              <a:shade val="50000"/>
+            </a:schemeClr>
+          </a:lnRef>
+          <a:fillRef idx="1">
+            <a:schemeClr val="accent1"/>
+          </a:fillRef>
+          <a:effectRef idx="0">
+            <a:schemeClr val="accent1"/>
+          </a:effectRef>
+          <a:fontRef idx="minor">
+            <a:schemeClr val="lt1"/>
+          </a:fontRef>
+        </p:style>
+        <p:txBody>
+          <a:bodyPr rtlCol="0" anchor="ctr"/>
+          <a:lstStyle/>
+          <a:p>
+            <a:pPr algn="ctr"/>
+            <a:r>
+              <a:rPr lang="en-US" sz="2000" dirty="0" smtClean="0">
+                <a:solidFill>
+                  <a:schemeClr val="accent1">
+                    <a:lumMod val="50000"/>
+                  </a:schemeClr>
+                </a:solidFill>
+              </a:rPr>
+              <a:t>background.js</a:t>
+            </a:r>
+          </a:p>
+          <a:p>
+            <a:pPr algn="ctr"/>
+            <a:r>
+              <a:rPr lang="en-US" sz="2000" dirty="0" smtClean="0">
+                <a:solidFill>
+                  <a:schemeClr val="accent1">
+                    <a:lumMod val="50000"/>
+                  </a:schemeClr>
+                </a:solidFill>
+              </a:rPr>
+              <a:t>API relay + routing</a:t>
+            </a:r>
+            <a:endParaRPr lang="en-US" sz="2000" dirty="0">
+              <a:solidFill>
+                <a:schemeClr val="accent1">
+                  <a:lumMod val="50000"/>
+                </a:schemeClr>
+              </a:solidFill>
+            </a:endParaRPr>
+          </a:p>
+        </p:txBody>
+      </p:sp>
+      <p:sp>
+        <p:nvSpPr>
+          <p:cNvPr id="17" name="Rounded Rectangle 16"/>
+          <p:cNvSpPr/>
+          <p:nvPr/>
+        </p:nvSpPr>
+        <p:spPr>
+          <a:xfrm>
+            <a:off x="2696244" y="3818407"/>
+            <a:ext cx="2484120" cy="1115908"/>
+          </a:xfrm>
+          <a:prstGeom prst="roundRect">
+            <a:avLst/>
+          </a:prstGeom>
+          <a:solidFill>
+            <a:schemeClr val="accent2">
+              <a:lumMod val="40000"/>
+              <a:lumOff val="60000"/>
+            </a:schemeClr>
+          </a:solidFill>
+          <a:ln>
+            <a:solidFill>
+              <a:schemeClr val="accent2">
+                <a:lumMod val="50000"/>
+              </a:schemeClr>
+            </a:solidFill>
+          </a:ln>
+        </p:spPr>
+        <p:style>
+          <a:lnRef idx="2">
+            <a:schemeClr val="accent1">
+              <a:shade val="50000"/>
+            </a:schemeClr>
+          </a:lnRef>
+          <a:fillRef idx="1">
+            <a:schemeClr val="accent1"/>
+          </a:fillRef>
+          <a:effectRef idx="0">
+            <a:schemeClr val="accent1"/>
+          </a:effectRef>
+          <a:fontRef idx="minor">
+            <a:schemeClr val="lt1"/>
+          </a:fontRef>
+        </p:style>
+        <p:txBody>
+          <a:bodyPr rtlCol="0" anchor="ctr"/>
+          <a:lstStyle/>
+          <a:p>
+            <a:pPr algn="ctr"/>
+            <a:r>
+              <a:rPr lang="en-US" sz="2000" dirty="0" err="1" smtClean="0">
+                <a:solidFill>
+                  <a:schemeClr val="accent2">
+                    <a:lumMod val="50000"/>
+                  </a:schemeClr>
+                </a:solidFill>
+              </a:rPr>
+              <a:t>Cloudflare</a:t>
+            </a:r>
+            <a:r>
+              <a:rPr lang="en-US" sz="2000" dirty="0" smtClean="0">
+                <a:solidFill>
+                  <a:schemeClr val="accent2">
+                    <a:lumMod val="50000"/>
+                  </a:schemeClr>
+                </a:solidFill>
+              </a:rPr>
+              <a:t> Worker</a:t>
+            </a:r>
+          </a:p>
+          <a:p>
+            <a:pPr algn="ctr"/>
+            <a:r>
+              <a:rPr lang="en-US" sz="2000" dirty="0" smtClean="0">
+                <a:solidFill>
+                  <a:schemeClr val="accent2">
+                    <a:lumMod val="50000"/>
+                  </a:schemeClr>
+                </a:solidFill>
+              </a:rPr>
+              <a:t>CORS + rate limiting</a:t>
+            </a:r>
+            <a:endParaRPr lang="en-US" sz="2000" dirty="0">
+              <a:solidFill>
+                <a:schemeClr val="accent2">
+                  <a:lumMod val="50000"/>
+                </a:schemeClr>
+              </a:solidFill>
+            </a:endParaRPr>
+          </a:p>
+        </p:txBody>
+      </p:sp>
+      <p:sp>
+        <p:nvSpPr>
+          <p:cNvPr id="18" name="Rounded Rectangle 17"/>
+          <p:cNvSpPr/>
+          <p:nvPr/>
+        </p:nvSpPr>
+        <p:spPr>
+          <a:xfrm>
+            <a:off x="8347915" y="3818406"/>
+            <a:ext cx="2484120" cy="1115908"/>
+          </a:xfrm>
+          <a:prstGeom prst="roundRect">
+            <a:avLst/>
+          </a:prstGeom>
+          <a:solidFill>
+            <a:schemeClr val="accent2">
+              <a:lumMod val="40000"/>
+              <a:lumOff val="60000"/>
+            </a:schemeClr>
+          </a:solidFill>
+          <a:ln>
+            <a:solidFill>
+              <a:schemeClr val="accent2">
+                <a:lumMod val="50000"/>
+              </a:schemeClr>
+            </a:solidFill>
+          </a:ln>
+        </p:spPr>
+        <p:style>
+          <a:lnRef idx="2">
+            <a:schemeClr val="accent1">
+              <a:shade val="50000"/>
+            </a:schemeClr>
+          </a:lnRef>
+          <a:fillRef idx="1">
+            <a:schemeClr val="accent1"/>
+          </a:fillRef>
+          <a:effectRef idx="0">
+            <a:schemeClr val="accent1"/>
+          </a:effectRef>
+          <a:fontRef idx="minor">
+            <a:schemeClr val="lt1"/>
+          </a:fontRef>
+        </p:style>
+        <p:txBody>
+          <a:bodyPr rtlCol="0" anchor="ctr"/>
+          <a:lstStyle/>
+          <a:p>
+            <a:pPr algn="ctr"/>
+            <a:r>
+              <a:rPr lang="en-US" sz="2000" dirty="0" smtClean="0">
+                <a:solidFill>
+                  <a:schemeClr val="accent2">
+                    <a:lumMod val="50000"/>
+                  </a:schemeClr>
+                </a:solidFill>
+              </a:rPr>
+              <a:t>KV store</a:t>
+            </a:r>
+          </a:p>
+          <a:p>
+            <a:pPr algn="ctr"/>
+            <a:r>
+              <a:rPr lang="en-US" sz="2000" dirty="0" smtClean="0">
+                <a:solidFill>
+                  <a:schemeClr val="accent2">
+                    <a:lumMod val="50000"/>
+                  </a:schemeClr>
+                </a:solidFill>
+              </a:rPr>
+              <a:t>30 </a:t>
+            </a:r>
+            <a:r>
+              <a:rPr lang="en-US" sz="2000" dirty="0" err="1" smtClean="0">
+                <a:solidFill>
+                  <a:schemeClr val="accent2">
+                    <a:lumMod val="50000"/>
+                  </a:schemeClr>
+                </a:solidFill>
+              </a:rPr>
+              <a:t>req</a:t>
+            </a:r>
+            <a:r>
+              <a:rPr lang="en-US" sz="2000" dirty="0" smtClean="0">
+                <a:solidFill>
+                  <a:schemeClr val="accent2">
+                    <a:lumMod val="50000"/>
+                  </a:schemeClr>
+                </a:solidFill>
+              </a:rPr>
+              <a:t>/</a:t>
+            </a:r>
+            <a:r>
+              <a:rPr lang="en-US" sz="2000" dirty="0" err="1" smtClean="0">
+                <a:solidFill>
+                  <a:schemeClr val="accent2">
+                    <a:lumMod val="50000"/>
+                  </a:schemeClr>
+                </a:solidFill>
+              </a:rPr>
+              <a:t>hr</a:t>
+            </a:r>
+            <a:r>
+              <a:rPr lang="en-US" sz="2000" dirty="0" smtClean="0">
+                <a:solidFill>
+                  <a:schemeClr val="accent2">
+                    <a:lumMod val="50000"/>
+                  </a:schemeClr>
+                </a:solidFill>
+              </a:rPr>
+              <a:t>/IP</a:t>
+            </a:r>
+            <a:endParaRPr lang="en-US" sz="2000" dirty="0">
+              <a:solidFill>
+                <a:schemeClr val="accent2">
+                  <a:lumMod val="50000"/>
+                </a:schemeClr>
+              </a:solidFill>
+            </a:endParaRPr>
+          </a:p>
+        </p:txBody>
+      </p:sp>
+      <p:sp>
+        <p:nvSpPr>
+          <p:cNvPr id="19" name="Rounded Rectangle 18"/>
+          <p:cNvSpPr/>
+          <p:nvPr/>
+        </p:nvSpPr>
+        <p:spPr>
+          <a:xfrm>
+            <a:off x="2696244" y="5737106"/>
+            <a:ext cx="2484120" cy="594490"/>
+          </a:xfrm>
+          <a:prstGeom prst="roundRect">
+            <a:avLst/>
+          </a:prstGeom>
+          <a:solidFill>
+            <a:schemeClr val="accent6">
+              <a:lumMod val="40000"/>
+              <a:lumOff val="60000"/>
+            </a:schemeClr>
+          </a:solidFill>
+          <a:ln>
+            <a:solidFill>
+              <a:schemeClr val="accent6">
+                <a:lumMod val="50000"/>
+              </a:schemeClr>
+            </a:solidFill>
+          </a:ln>
+        </p:spPr>
+        <p:style>
+          <a:lnRef idx="2">
+            <a:schemeClr val="accent1">
+              <a:shade val="50000"/>
+            </a:schemeClr>
+          </a:lnRef>
+          <a:fillRef idx="1">
+            <a:schemeClr val="accent1"/>
+          </a:fillRef>
+          <a:effectRef idx="0">
+            <a:schemeClr val="accent1"/>
+          </a:effectRef>
+          <a:fontRef idx="minor">
+            <a:schemeClr val="lt1"/>
+          </a:fontRef>
+        </p:style>
+        <p:txBody>
+          <a:bodyPr rtlCol="0" anchor="ctr"/>
+          <a:lstStyle/>
+          <a:p>
+            <a:pPr algn="ctr"/>
+            <a:r>
+              <a:rPr lang="en-US" sz="2000" dirty="0" err="1" smtClean="0">
+                <a:solidFill>
+                  <a:schemeClr val="accent6">
+                    <a:lumMod val="50000"/>
+                  </a:schemeClr>
+                </a:solidFill>
+              </a:rPr>
+              <a:t>Groq</a:t>
+            </a:r>
+            <a:r>
+              <a:rPr lang="en-US" sz="2000" dirty="0" smtClean="0">
+                <a:solidFill>
+                  <a:schemeClr val="accent6">
+                    <a:lumMod val="50000"/>
+                  </a:schemeClr>
+                </a:solidFill>
+              </a:rPr>
+              <a:t> – Llama 3.3 70B</a:t>
+            </a:r>
+            <a:endParaRPr lang="en-US" sz="2000" dirty="0">
+              <a:solidFill>
+                <a:schemeClr val="accent6">
+                  <a:lumMod val="50000"/>
+                </a:schemeClr>
+              </a:solidFill>
+            </a:endParaRPr>
+          </a:p>
+        </p:txBody>
+      </p:sp>
+      <p:cxnSp>
+        <p:nvCxnSpPr>
+          <p:cNvPr id="11" name="Straight Arrow Connector 10"/>
+          <p:cNvCxnSpPr>
+            <a:stCxn id="9" idx="3"/>
+            <a:endCxn id="15" idx="1"/>
+          </p:cNvCxnSpPr>
+          <p:nvPr/>
+        </p:nvCxnSpPr>
+        <p:spPr>
+          <a:xfrm flipV="1">
+            <a:off x="5138638" y="2384498"/>
+            <a:ext cx="775422" cy="7146"/>
+          </a:xfrm>
+          <a:prstGeom prst="straightConnector1">
+            <a:avLst/>
+          </a:prstGeom>
+          <a:ln w="28575">
+            <a:solidFill>
+              <a:schemeClr val="accent1">
+                <a:lumMod val="50000"/>
+              </a:schemeClr>
+            </a:solidFill>
+            <a:tailEnd type="triangle"/>
+          </a:ln>
+        </p:spPr>
+        <p:style>
+          <a:lnRef idx="1">
+            <a:schemeClr val="accent1"/>
+          </a:lnRef>
+          <a:fillRef idx="0">
+            <a:schemeClr val="accent1"/>
+          </a:fillRef>
+          <a:effectRef idx="0">
+            <a:schemeClr val="accent1"/>
+          </a:effectRef>
+          <a:fontRef idx="minor">
+            <a:schemeClr val="tx1"/>
+          </a:fontRef>
+        </p:style>
+      </p:cxnSp>
+      <p:cxnSp>
+        <p:nvCxnSpPr>
+          <p:cNvPr id="22" name="Straight Arrow Connector 21"/>
+          <p:cNvCxnSpPr/>
+          <p:nvPr/>
+        </p:nvCxnSpPr>
+        <p:spPr>
+          <a:xfrm flipV="1">
+            <a:off x="8411268" y="2388071"/>
+            <a:ext cx="775422" cy="7146"/>
+          </a:xfrm>
+          <a:prstGeom prst="straightConnector1">
+            <a:avLst/>
+          </a:prstGeom>
+          <a:ln w="28575">
+            <a:solidFill>
+              <a:schemeClr val="accent1">
+                <a:lumMod val="50000"/>
+              </a:schemeClr>
+            </a:solidFill>
+            <a:tailEnd type="triangle"/>
+          </a:ln>
+        </p:spPr>
+        <p:style>
+          <a:lnRef idx="1">
+            <a:schemeClr val="accent1"/>
+          </a:lnRef>
+          <a:fillRef idx="0">
+            <a:schemeClr val="accent1"/>
+          </a:fillRef>
+          <a:effectRef idx="0">
+            <a:schemeClr val="accent1"/>
+          </a:effectRef>
+          <a:fontRef idx="minor">
+            <a:schemeClr val="tx1"/>
+          </a:fontRef>
+        </p:style>
+      </p:cxnSp>
+      <p:cxnSp>
+        <p:nvCxnSpPr>
+          <p:cNvPr id="23" name="Straight Arrow Connector 22"/>
+          <p:cNvCxnSpPr>
+            <a:endCxn id="18" idx="1"/>
+          </p:cNvCxnSpPr>
+          <p:nvPr/>
+        </p:nvCxnSpPr>
+        <p:spPr>
+          <a:xfrm>
+            <a:off x="5180364" y="4376360"/>
+            <a:ext cx="3167551" cy="0"/>
+          </a:xfrm>
+          <a:prstGeom prst="straightConnector1">
+            <a:avLst/>
+          </a:prstGeom>
+          <a:ln w="28575">
+            <a:solidFill>
+              <a:schemeClr val="accent2">
+                <a:lumMod val="50000"/>
+              </a:schemeClr>
+            </a:solidFill>
+            <a:tailEnd type="triangle"/>
+          </a:ln>
+        </p:spPr>
+        <p:style>
+          <a:lnRef idx="1">
+            <a:schemeClr val="accent1"/>
+          </a:lnRef>
+          <a:fillRef idx="0">
+            <a:schemeClr val="accent1"/>
+          </a:fillRef>
+          <a:effectRef idx="0">
+            <a:schemeClr val="accent1"/>
+          </a:effectRef>
+          <a:fontRef idx="minor">
+            <a:schemeClr val="tx1"/>
+          </a:fontRef>
+        </p:style>
+      </p:cxnSp>
+      <p:cxnSp>
+        <p:nvCxnSpPr>
+          <p:cNvPr id="25" name="Straight Arrow Connector 24"/>
+          <p:cNvCxnSpPr/>
+          <p:nvPr/>
+        </p:nvCxnSpPr>
+        <p:spPr>
+          <a:xfrm>
+            <a:off x="3695023" y="4934315"/>
+            <a:ext cx="0" cy="802791"/>
+          </a:xfrm>
+          <a:prstGeom prst="straightConnector1">
+            <a:avLst/>
+          </a:prstGeom>
+          <a:ln w="28575">
+            <a:solidFill>
+              <a:schemeClr val="accent6">
+                <a:lumMod val="50000"/>
+              </a:schemeClr>
+            </a:solidFill>
+            <a:tailEnd type="triangle"/>
+          </a:ln>
+        </p:spPr>
+        <p:style>
+          <a:lnRef idx="1">
+            <a:schemeClr val="accent1"/>
+          </a:lnRef>
+          <a:fillRef idx="0">
+            <a:schemeClr val="accent1"/>
+          </a:fillRef>
+          <a:effectRef idx="0">
+            <a:schemeClr val="accent1"/>
+          </a:effectRef>
+          <a:fontRef idx="minor">
+            <a:schemeClr val="tx1"/>
+          </a:fontRef>
+        </p:style>
+      </p:cxnSp>
+      <p:cxnSp>
+        <p:nvCxnSpPr>
+          <p:cNvPr id="28" name="Straight Arrow Connector 27"/>
+          <p:cNvCxnSpPr/>
+          <p:nvPr/>
+        </p:nvCxnSpPr>
+        <p:spPr>
+          <a:xfrm flipV="1">
+            <a:off x="4085111" y="4934314"/>
+            <a:ext cx="0" cy="802791"/>
+          </a:xfrm>
+          <a:prstGeom prst="straightConnector1">
+            <a:avLst/>
+          </a:prstGeom>
+          <a:ln w="28575">
+            <a:solidFill>
+              <a:schemeClr val="accent2">
+                <a:lumMod val="50000"/>
+              </a:schemeClr>
+            </a:solidFill>
+            <a:tailEnd type="triangle"/>
+          </a:ln>
+        </p:spPr>
+        <p:style>
+          <a:lnRef idx="1">
+            <a:schemeClr val="accent1"/>
+          </a:lnRef>
+          <a:fillRef idx="0">
+            <a:schemeClr val="accent1"/>
+          </a:fillRef>
+          <a:effectRef idx="0">
+            <a:schemeClr val="accent1"/>
+          </a:effectRef>
+          <a:fontRef idx="minor">
+            <a:schemeClr val="tx1"/>
+          </a:fontRef>
+        </p:style>
+      </p:cxnSp>
+      <p:sp>
+        <p:nvSpPr>
+          <p:cNvPr id="26" name="Rectangle 25"/>
+          <p:cNvSpPr/>
+          <p:nvPr/>
+        </p:nvSpPr>
+        <p:spPr>
+          <a:xfrm>
+            <a:off x="2794584" y="5107874"/>
+            <a:ext cx="900439" cy="369332"/>
+          </a:xfrm>
+          <a:prstGeom prst="rect">
+            <a:avLst/>
+          </a:prstGeom>
+        </p:spPr>
+        <p:txBody>
+          <a:bodyPr wrap="none">
+            <a:spAutoFit/>
+          </a:bodyPr>
+          <a:lstStyle/>
+          <a:p>
+            <a:pPr algn="ctr"/>
+            <a:r>
+              <a:rPr lang="en-US" dirty="0" smtClean="0">
+                <a:solidFill>
+                  <a:schemeClr val="accent6">
+                    <a:lumMod val="50000"/>
+                  </a:schemeClr>
+                </a:solidFill>
+              </a:rPr>
+              <a:t>request</a:t>
+            </a:r>
+            <a:endParaRPr lang="en-US" dirty="0">
+              <a:solidFill>
+                <a:schemeClr val="accent6">
+                  <a:lumMod val="50000"/>
+                </a:schemeClr>
+              </a:solidFill>
+            </a:endParaRPr>
+          </a:p>
+        </p:txBody>
+      </p:sp>
+      <p:sp>
+        <p:nvSpPr>
+          <p:cNvPr id="33" name="Rectangle 32"/>
+          <p:cNvSpPr/>
+          <p:nvPr/>
+        </p:nvSpPr>
+        <p:spPr>
+          <a:xfrm>
+            <a:off x="4076634" y="5131267"/>
+            <a:ext cx="1037656" cy="369332"/>
+          </a:xfrm>
+          <a:prstGeom prst="rect">
+            <a:avLst/>
+          </a:prstGeom>
+        </p:spPr>
+        <p:txBody>
+          <a:bodyPr wrap="none">
+            <a:spAutoFit/>
+          </a:bodyPr>
+          <a:lstStyle/>
+          <a:p>
+            <a:pPr algn="ctr"/>
+            <a:r>
+              <a:rPr lang="en-US" dirty="0" smtClean="0">
+                <a:solidFill>
+                  <a:schemeClr val="accent2">
+                    <a:lumMod val="50000"/>
+                  </a:schemeClr>
+                </a:solidFill>
+              </a:rPr>
+              <a:t>response</a:t>
+            </a:r>
+            <a:endParaRPr lang="en-US" dirty="0">
+              <a:solidFill>
+                <a:schemeClr val="accent2">
+                  <a:lumMod val="50000"/>
+                </a:schemeClr>
+              </a:solidFill>
+            </a:endParaRPr>
+          </a:p>
+        </p:txBody>
+      </p:sp>
+      <p:sp>
+        <p:nvSpPr>
+          <p:cNvPr id="36" name="Rectangle 35"/>
+          <p:cNvSpPr/>
+          <p:nvPr/>
+        </p:nvSpPr>
+        <p:spPr>
+          <a:xfrm>
+            <a:off x="5958651" y="4007028"/>
+            <a:ext cx="1772921" cy="369332"/>
+          </a:xfrm>
+          <a:prstGeom prst="rect">
+            <a:avLst/>
+          </a:prstGeom>
+        </p:spPr>
+        <p:txBody>
+          <a:bodyPr wrap="none">
+            <a:spAutoFit/>
+          </a:bodyPr>
+          <a:lstStyle/>
+          <a:p>
+            <a:pPr algn="ctr"/>
+            <a:r>
+              <a:rPr lang="en-US" dirty="0" smtClean="0">
+                <a:solidFill>
+                  <a:schemeClr val="accent2">
+                    <a:lumMod val="50000"/>
+                  </a:schemeClr>
+                </a:solidFill>
+              </a:rPr>
+              <a:t>check/increment</a:t>
+            </a:r>
+            <a:endParaRPr lang="en-US" dirty="0">
+              <a:solidFill>
+                <a:schemeClr val="accent2">
+                  <a:lumMod val="50000"/>
+                </a:schemeClr>
+              </a:solidFill>
+            </a:endParaRPr>
+          </a:p>
+        </p:txBody>
+      </p:sp>
+      <p:cxnSp>
+        <p:nvCxnSpPr>
+          <p:cNvPr id="31" name="Elbow Connector 30"/>
+          <p:cNvCxnSpPr/>
+          <p:nvPr/>
+        </p:nvCxnSpPr>
+        <p:spPr>
+          <a:xfrm rot="5400000">
+            <a:off x="6432185" y="145323"/>
+            <a:ext cx="868809" cy="6477358"/>
+          </a:xfrm>
+          <a:prstGeom prst="bentConnector3">
+            <a:avLst/>
+          </a:prstGeom>
+          <a:ln w="28575">
+            <a:solidFill>
+              <a:schemeClr val="accent2">
+                <a:lumMod val="50000"/>
+              </a:schemeClr>
+            </a:solidFill>
+            <a:tailEnd type="triangle"/>
+          </a:ln>
+        </p:spPr>
+        <p:style>
+          <a:lnRef idx="1">
+            <a:schemeClr val="accent1"/>
+          </a:lnRef>
+          <a:fillRef idx="0">
+            <a:schemeClr val="accent1"/>
+          </a:fillRef>
+          <a:effectRef idx="0">
+            <a:schemeClr val="accent1"/>
+          </a:effectRef>
+          <a:fontRef idx="minor">
+            <a:schemeClr val="tx1"/>
+          </a:fontRef>
+        </p:style>
+      </p:cxnSp>
+      <p:sp>
+        <p:nvSpPr>
+          <p:cNvPr id="39" name="Rectangle 38"/>
+          <p:cNvSpPr/>
+          <p:nvPr/>
+        </p:nvSpPr>
+        <p:spPr>
+          <a:xfrm>
+            <a:off x="6426358" y="3014670"/>
+            <a:ext cx="900439" cy="369332"/>
+          </a:xfrm>
+          <a:prstGeom prst="rect">
+            <a:avLst/>
+          </a:prstGeom>
+        </p:spPr>
+        <p:txBody>
+          <a:bodyPr wrap="none">
+            <a:spAutoFit/>
+          </a:bodyPr>
+          <a:lstStyle/>
+          <a:p>
+            <a:pPr algn="ctr"/>
+            <a:r>
+              <a:rPr lang="en-US" dirty="0" smtClean="0">
+                <a:solidFill>
+                  <a:schemeClr val="accent2">
+                    <a:lumMod val="50000"/>
+                  </a:schemeClr>
+                </a:solidFill>
+              </a:rPr>
+              <a:t>request</a:t>
+            </a:r>
+            <a:endParaRPr lang="en-US" dirty="0">
+              <a:solidFill>
+                <a:schemeClr val="accent2">
+                  <a:lumMod val="50000"/>
+                </a:schemeClr>
+              </a:solidFill>
+            </a:endParaRPr>
+          </a:p>
+        </p:txBody>
+      </p:sp>
+      <p:cxnSp>
+        <p:nvCxnSpPr>
+          <p:cNvPr id="34" name="Elbow Connector 33"/>
+          <p:cNvCxnSpPr/>
+          <p:nvPr/>
+        </p:nvCxnSpPr>
+        <p:spPr>
+          <a:xfrm rot="5400000" flipH="1" flipV="1">
+            <a:off x="6948122" y="145324"/>
+            <a:ext cx="868809" cy="6477358"/>
+          </a:xfrm>
+          <a:prstGeom prst="bentConnector3">
+            <a:avLst/>
+          </a:prstGeom>
+          <a:ln w="28575">
+            <a:solidFill>
+              <a:schemeClr val="accent1">
+                <a:lumMod val="50000"/>
+              </a:schemeClr>
+            </a:solidFill>
+            <a:tailEnd type="triangle"/>
+          </a:ln>
+        </p:spPr>
+        <p:style>
+          <a:lnRef idx="1">
+            <a:schemeClr val="accent1"/>
+          </a:lnRef>
+          <a:fillRef idx="0">
+            <a:schemeClr val="accent1"/>
+          </a:fillRef>
+          <a:effectRef idx="0">
+            <a:schemeClr val="accent1"/>
+          </a:effectRef>
+          <a:fontRef idx="minor">
+            <a:schemeClr val="tx1"/>
+          </a:fontRef>
+        </p:style>
+      </p:cxnSp>
+      <p:sp>
+        <p:nvSpPr>
+          <p:cNvPr id="42" name="Rectangle 41"/>
+          <p:cNvSpPr/>
+          <p:nvPr/>
+        </p:nvSpPr>
+        <p:spPr>
+          <a:xfrm>
+            <a:off x="6360362" y="3384002"/>
+            <a:ext cx="1037656" cy="369332"/>
+          </a:xfrm>
+          <a:prstGeom prst="rect">
+            <a:avLst/>
+          </a:prstGeom>
+        </p:spPr>
+        <p:txBody>
+          <a:bodyPr wrap="none">
+            <a:spAutoFit/>
+          </a:bodyPr>
+          <a:lstStyle/>
+          <a:p>
+            <a:pPr algn="ctr"/>
+            <a:r>
+              <a:rPr lang="en-US" dirty="0" smtClean="0">
+                <a:solidFill>
+                  <a:schemeClr val="accent1">
+                    <a:lumMod val="50000"/>
+                  </a:schemeClr>
+                </a:solidFill>
+              </a:rPr>
+              <a:t>response</a:t>
+            </a:r>
+            <a:endParaRPr lang="en-US" dirty="0">
+              <a:solidFill>
+                <a:schemeClr val="accent1">
+                  <a:lumMod val="50000"/>
+                </a:schemeClr>
+              </a:solidFill>
+            </a:endParaRPr>
+          </a:p>
+        </p:txBody>
+      </p:sp>
+    </p:spTree>
+    <p:extLst>
+      <p:ext uri="{BB962C8B-B14F-4D97-AF65-F5344CB8AC3E}">
+        <p14:creationId xmlns:p14="http://schemas.microsoft.com/office/powerpoint/2010/main" val="2373677135"/>
+      </p:ext>
+    </p:extLst>
+  </p:cSld>
+  <p:clrMapOvr>
+    <a:masterClrMapping/>
+  </p:clrMapOvr>
+</p:sld>
+</file>
+
 <file path=ppt/theme/theme1.xml><?xml version="1.0" encoding="utf-8"?>
 <a:theme xmlns:a="http://schemas.openxmlformats.org/drawingml/2006/main" name="Office Theme">
   <a:themeElements>

--- a/figures/UI.pptx
+++ b/figures/UI.pptx
@@ -10,8 +10,9 @@
     <p:sldId id="258" r:id="rId4"/>
     <p:sldId id="259" r:id="rId5"/>
     <p:sldId id="261" r:id="rId6"/>
-    <p:sldId id="260" r:id="rId7"/>
-    <p:sldId id="262" r:id="rId8"/>
+    <p:sldId id="263" r:id="rId7"/>
+    <p:sldId id="260" r:id="rId8"/>
+    <p:sldId id="262" r:id="rId9"/>
   </p:sldIdLst>
   <p:sldSz cx="12192000" cy="6858000"/>
   <p:notesSz cx="6858000" cy="9144000"/>
@@ -3385,6 +3386,108 @@
       </p:grpSpPr>
       <p:pic>
         <p:nvPicPr>
+          <p:cNvPr id="8" name="Picture 7"/>
+          <p:cNvPicPr>
+            <a:picLocks noChangeAspect="1"/>
+          </p:cNvPicPr>
+          <p:nvPr/>
+        </p:nvPicPr>
+        <p:blipFill>
+          <a:blip r:embed="rId2"/>
+          <a:stretch>
+            <a:fillRect/>
+          </a:stretch>
+        </p:blipFill>
+        <p:spPr>
+          <a:xfrm>
+            <a:off x="97130" y="0"/>
+            <a:ext cx="3566895" cy="6858000"/>
+          </a:xfrm>
+          <a:prstGeom prst="rect">
+            <a:avLst/>
+          </a:prstGeom>
+        </p:spPr>
+      </p:pic>
+      <p:pic>
+        <p:nvPicPr>
+          <p:cNvPr id="9" name="Picture 8"/>
+          <p:cNvPicPr>
+            <a:picLocks noChangeAspect="1"/>
+          </p:cNvPicPr>
+          <p:nvPr/>
+        </p:nvPicPr>
+        <p:blipFill>
+          <a:blip r:embed="rId3"/>
+          <a:stretch>
+            <a:fillRect/>
+          </a:stretch>
+        </p:blipFill>
+        <p:spPr>
+          <a:xfrm>
+            <a:off x="4318612" y="0"/>
+            <a:ext cx="3574250" cy="6858000"/>
+          </a:xfrm>
+          <a:prstGeom prst="rect">
+            <a:avLst/>
+          </a:prstGeom>
+        </p:spPr>
+      </p:pic>
+      <p:pic>
+        <p:nvPicPr>
+          <p:cNvPr id="10" name="Picture 9"/>
+          <p:cNvPicPr>
+            <a:picLocks noChangeAspect="1"/>
+          </p:cNvPicPr>
+          <p:nvPr/>
+        </p:nvPicPr>
+        <p:blipFill>
+          <a:blip r:embed="rId4"/>
+          <a:stretch>
+            <a:fillRect/>
+          </a:stretch>
+        </p:blipFill>
+        <p:spPr>
+          <a:xfrm>
+            <a:off x="8547449" y="0"/>
+            <a:ext cx="3558955" cy="6852920"/>
+          </a:xfrm>
+          <a:prstGeom prst="rect">
+            <a:avLst/>
+          </a:prstGeom>
+        </p:spPr>
+      </p:pic>
+    </p:spTree>
+    <p:extLst>
+      <p:ext uri="{BB962C8B-B14F-4D97-AF65-F5344CB8AC3E}">
+        <p14:creationId xmlns:p14="http://schemas.microsoft.com/office/powerpoint/2010/main" val="3542789452"/>
+      </p:ext>
+    </p:extLst>
+  </p:cSld>
+  <p:clrMapOvr>
+    <a:masterClrMapping/>
+  </p:clrMapOvr>
+</p:sld>
+</file>
+
+<file path=ppt/slides/slide7.xml><?xml version="1.0" encoding="utf-8"?>
+<p:sld xmlns:a="http://schemas.openxmlformats.org/drawingml/2006/main" xmlns:r="http://schemas.openxmlformats.org/officeDocument/2006/relationships" xmlns:p="http://schemas.openxmlformats.org/presentationml/2006/main">
+  <p:cSld>
+    <p:spTree>
+      <p:nvGrpSpPr>
+        <p:cNvPr id="1" name=""/>
+        <p:cNvGrpSpPr/>
+        <p:nvPr/>
+      </p:nvGrpSpPr>
+      <p:grpSpPr>
+        <a:xfrm>
+          <a:off x="0" y="0"/>
+          <a:ext cx="0" cy="0"/>
+          <a:chOff x="0" y="0"/>
+          <a:chExt cx="0" cy="0"/>
+        </a:xfrm>
+      </p:grpSpPr>
+      <p:pic>
+        <p:nvPicPr>
           <p:cNvPr id="4" name="Picture 3"/>
           <p:cNvPicPr>
             <a:picLocks noChangeAspect="1"/>
@@ -3420,7 +3523,7 @@
 </p:sld>
 </file>
 
-<file path=ppt/slides/slide7.xml><?xml version="1.0" encoding="utf-8"?>
+<file path=ppt/slides/slide8.xml><?xml version="1.0" encoding="utf-8"?>
 <p:sld xmlns:a="http://schemas.openxmlformats.org/drawingml/2006/main" xmlns:r="http://schemas.openxmlformats.org/officeDocument/2006/relationships" xmlns:p="http://schemas.openxmlformats.org/presentationml/2006/main">
   <p:cSld>
     <p:spTree>
